--- a/artifacts/speaking-portfolio-expanded/decks/retrieval-15min-handout.pptx
+++ b/artifacts/speaking-portfolio-expanded/decks/retrieval-15min-handout.pptx
@@ -328,7 +328,7 @@
                 <a:ea typeface="Arial"/>
                 <a:cs typeface="Arial"/>
               </a:rPr>
-              <a:t xml:space="preserve">Your Eval Suite Has a Grandfather</a:t>
+              <a:t xml:space="preserve">Three Search Methods in a Fundable Trenchcoat</a:t>
             </a:r>
             <a:endParaRPr lang="en-US" sz="1200"/>
           </a:p>
@@ -809,7 +809,7 @@
                 <a:ea typeface="Arial"/>
                 <a:cs typeface="Arial"/>
               </a:rPr>
-              <a:t xml:space="preserve">Your Eval Suite Has a Grandfather</a:t>
+              <a:t xml:space="preserve">Three Search Methods in a Fundable Trenchcoat</a:t>
             </a:r>
             <a:endParaRPr lang="en-US" sz="1200"/>
           </a:p>
@@ -1290,7 +1290,7 @@
                 <a:ea typeface="Arial"/>
                 <a:cs typeface="Arial"/>
               </a:rPr>
-              <a:t xml:space="preserve">Your Eval Suite Has a Grandfather</a:t>
+              <a:t xml:space="preserve">Three Search Methods in a Fundable Trenchcoat</a:t>
             </a:r>
             <a:endParaRPr lang="en-US" sz="1200"/>
           </a:p>
@@ -1909,7 +1909,7 @@
                 <a:ea typeface="Arial"/>
                 <a:cs typeface="Arial"/>
               </a:rPr>
-              <a:t xml:space="preserve">Your Eval Suite Has a Grandfather</a:t>
+              <a:t xml:space="preserve">Three Search Methods in a Fundable Trenchcoat</a:t>
             </a:r>
             <a:endParaRPr lang="en-US" sz="1200"/>
           </a:p>
@@ -2436,7 +2436,7 @@
                 <a:ea typeface="Arial"/>
                 <a:cs typeface="Arial"/>
               </a:rPr>
-              <a:t xml:space="preserve">Your Eval Suite Has a Grandfather</a:t>
+              <a:t xml:space="preserve">Three Search Methods in a Fundable Trenchcoat</a:t>
             </a:r>
             <a:endParaRPr lang="en-US" sz="1200"/>
           </a:p>
@@ -3055,7 +3055,7 @@
                 <a:ea typeface="Arial"/>
                 <a:cs typeface="Arial"/>
               </a:rPr>
-              <a:t xml:space="preserve">Your Eval Suite Has a Grandfather</a:t>
+              <a:t xml:space="preserve">Three Search Methods in a Fundable Trenchcoat</a:t>
             </a:r>
             <a:endParaRPr lang="en-US" sz="1200"/>
           </a:p>
@@ -3582,7 +3582,7 @@
                 <a:ea typeface="Arial"/>
                 <a:cs typeface="Arial"/>
               </a:rPr>
-              <a:t xml:space="preserve">Your Eval Suite Has a Grandfather</a:t>
+              <a:t xml:space="preserve">Three Search Methods in a Fundable Trenchcoat</a:t>
             </a:r>
             <a:endParaRPr lang="en-US" sz="1200"/>
           </a:p>
@@ -4063,7 +4063,7 @@
                 <a:ea typeface="Arial"/>
                 <a:cs typeface="Arial"/>
               </a:rPr>
-              <a:t xml:space="preserve">Your Eval Suite Has a Grandfather</a:t>
+              <a:t xml:space="preserve">Three Search Methods in a Fundable Trenchcoat</a:t>
             </a:r>
             <a:endParaRPr lang="en-US" sz="1200"/>
           </a:p>
@@ -4155,7 +4155,7 @@
                 <a:ea typeface="Arial"/>
                 <a:cs typeface="Arial"/>
               </a:rPr>
-              <a:t xml:space="preserve">Your eval suite has a grandfather.</a:t>
+              <a:t xml:space="preserve">Three search methods in a fundable trenchcoat.</a:t>
             </a:r>
             <a:endParaRPr lang="en-US" sz="1200"/>
           </a:p>
@@ -4664,7 +4664,30 @@
                 <a:ea typeface="Arial"/>
                 <a:cs typeface="Arial"/>
               </a:rPr>
-              <a:t xml:space="preserve">Your Eval Suite Has a Grandfather</a:t>
+              <a:t xml:space="preserve">Three Search Methods in a Fundable</a:t>
+            </a:r>
+            <a:endParaRPr lang="en-US" sz="3750"/>
+          </a:p>
+          <a:p>
+            <a:pPr marL="0" indent="0">
+              <a:lnSpc>
+                <a:spcPts val="4500"/>
+              </a:lnSpc>
+              <a:spcAft>
+                <a:spcPts val="0"/>
+              </a:spcAft>
+              <a:buNone/>
+            </a:pPr>
+            <a:r>
+              <a:rPr lang="en-US" sz="3750" b="1">
+                <a:solidFill>
+                  <a:srgbClr val="202B33"/>
+                </a:solidFill>
+                <a:latin typeface="Arial"/>
+                <a:ea typeface="Arial"/>
+                <a:cs typeface="Arial"/>
+              </a:rPr>
+              <a:t xml:space="preserve">Trenchcoat</a:t>
             </a:r>
             <a:endParaRPr lang="en-US" sz="3750"/>
           </a:p>
@@ -4834,7 +4857,7 @@
                 <a:ea typeface="Arial"/>
                 <a:cs typeface="Arial"/>
               </a:rPr>
-              <a:t xml:space="preserve">Your Eval Suite Has a Grandfather</a:t>
+              <a:t xml:space="preserve">Three Search Methods in a Fundable Trenchcoat</a:t>
             </a:r>
             <a:endParaRPr lang="en-US" sz="975"/>
           </a:p>
@@ -5667,7 +5690,7 @@
                 <a:ea typeface="Arial"/>
                 <a:cs typeface="Arial"/>
               </a:rPr>
-              <a:t xml:space="preserve">Your Eval Suite Has a Grandfather</a:t>
+              <a:t xml:space="preserve">Three Search Methods in a Fundable Trenchcoat</a:t>
             </a:r>
             <a:endParaRPr lang="en-US" sz="975"/>
           </a:p>
@@ -6500,7 +6523,7 @@
                 <a:ea typeface="Arial"/>
                 <a:cs typeface="Arial"/>
               </a:rPr>
-              <a:t xml:space="preserve">Your Eval Suite Has a Grandfather</a:t>
+              <a:t xml:space="preserve">Three Search Methods in a Fundable Trenchcoat</a:t>
             </a:r>
             <a:endParaRPr lang="en-US" sz="975"/>
           </a:p>
@@ -7287,7 +7310,7 @@
                 <a:ea typeface="Arial"/>
                 <a:cs typeface="Arial"/>
               </a:rPr>
-              <a:t xml:space="preserve">Your Eval Suite Has a Grandfather</a:t>
+              <a:t xml:space="preserve">Three Search Methods in a Fundable Trenchcoat</a:t>
             </a:r>
             <a:endParaRPr lang="en-US" sz="975"/>
           </a:p>
@@ -8281,7 +8304,7 @@
                 <a:ea typeface="Arial"/>
                 <a:cs typeface="Arial"/>
               </a:rPr>
-              <a:t xml:space="preserve">Your Eval Suite Has a Grandfather</a:t>
+              <a:t xml:space="preserve">Three Search Methods in a Fundable Trenchcoat</a:t>
             </a:r>
             <a:endParaRPr lang="en-US" sz="975"/>
           </a:p>
@@ -9077,7 +9100,7 @@
                 <a:ea typeface="Arial"/>
                 <a:cs typeface="Arial"/>
               </a:rPr>
-              <a:t xml:space="preserve">Your Eval Suite Has a Grandfather</a:t>
+              <a:t xml:space="preserve">Three Search Methods in a Fundable Trenchcoat</a:t>
             </a:r>
             <a:endParaRPr lang="en-US" sz="975"/>
           </a:p>
@@ -10186,7 +10209,7 @@
                 <a:ea typeface="Arial"/>
                 <a:cs typeface="Arial"/>
               </a:rPr>
-              <a:t xml:space="preserve">Your Eval Suite Has a Grandfather</a:t>
+              <a:t xml:space="preserve">Three Search Methods in a Fundable Trenchcoat</a:t>
             </a:r>
             <a:endParaRPr lang="en-US" sz="975"/>
           </a:p>
@@ -11088,7 +11111,7 @@
                 <a:ea typeface="Arial"/>
                 <a:cs typeface="Arial"/>
               </a:rPr>
-              <a:t xml:space="preserve">Your Eval Suite Has a Grandfather</a:t>
+              <a:t xml:space="preserve">Three Search Methods in a Fundable Trenchcoat</a:t>
             </a:r>
             <a:endParaRPr lang="en-US" sz="975"/>
           </a:p>
@@ -12013,7 +12036,7 @@
                 <a:ea typeface="Arial"/>
                 <a:cs typeface="Arial"/>
               </a:rPr>
-              <a:t xml:space="preserve">Your Eval Suite Has a Grandfather</a:t>
+              <a:t xml:space="preserve">Three Search Methods in a Fundable Trenchcoat</a:t>
             </a:r>
             <a:endParaRPr lang="en-US" sz="975"/>
           </a:p>
@@ -12242,7 +12265,30 @@
                 <a:ea typeface="Arial"/>
                 <a:cs typeface="Arial"/>
               </a:rPr>
-              <a:t xml:space="preserve">Your eval suite has a grandfather.</a:t>
+              <a:t xml:space="preserve">Three search methods in a fundable</a:t>
+            </a:r>
+            <a:endParaRPr lang="en-US" sz="1500"/>
+          </a:p>
+          <a:p>
+            <a:pPr marL="0" indent="0">
+              <a:lnSpc>
+                <a:spcPts val="1950"/>
+              </a:lnSpc>
+              <a:spcAft>
+                <a:spcPts val="0"/>
+              </a:spcAft>
+              <a:buNone/>
+            </a:pPr>
+            <a:r>
+              <a:rPr lang="en-US" sz="1500" b="0">
+                <a:solidFill>
+                  <a:srgbClr val="202B33"/>
+                </a:solidFill>
+                <a:latin typeface="Arial"/>
+                <a:ea typeface="Arial"/>
+                <a:cs typeface="Arial"/>
+              </a:rPr>
+              <a:t xml:space="preserve">trenchcoat.</a:t>
             </a:r>
             <a:endParaRPr lang="en-US" sz="1500"/>
           </a:p>
@@ -12450,29 +12496,6 @@
                 <a:cs typeface="Arial"/>
               </a:rPr>
               <a:t xml:space="preserve">Those words tell us why rare identifiers</a:t>
-            </a:r>
-            <a:endParaRPr lang="en-US" sz="1500"/>
-          </a:p>
-          <a:p>
-            <a:pPr marL="0" indent="0">
-              <a:lnSpc>
-                <a:spcPts val="1950"/>
-              </a:lnSpc>
-              <a:spcAft>
-                <a:spcPts val="0"/>
-              </a:spcAft>
-              <a:buNone/>
-            </a:pPr>
-            <a:r>
-              <a:rPr lang="en-US" sz="1500" b="0">
-                <a:solidFill>
-                  <a:srgbClr val="202B33"/>
-                </a:solidFill>
-                <a:latin typeface="Arial"/>
-                <a:ea typeface="Arial"/>
-                <a:cs typeface="Arial"/>
-              </a:rPr>
-              <a:t xml:space="preserve">matter, why synonyms are hard, why a</a:t>
             </a:r>
             <a:endParaRPr lang="en-US" sz="1500"/>
           </a:p>
@@ -12521,6 +12544,29 @@
                 <a:ea typeface="Arial"/>
                 <a:cs typeface="Arial"/>
               </a:rPr>
+              <a:t xml:space="preserve">matter, why synonyms are hard, why a</a:t>
+            </a:r>
+            <a:endParaRPr lang="en-US" sz="1500"/>
+          </a:p>
+          <a:p>
+            <a:pPr marL="0" indent="0">
+              <a:lnSpc>
+                <a:spcPts val="1950"/>
+              </a:lnSpc>
+              <a:spcAft>
+                <a:spcPts val="0"/>
+              </a:spcAft>
+              <a:buNone/>
+            </a:pPr>
+            <a:r>
+              <a:rPr lang="en-US" sz="1500" b="0">
+                <a:solidFill>
+                  <a:srgbClr val="202B33"/>
+                </a:solidFill>
+                <a:latin typeface="Arial"/>
+                <a:ea typeface="Arial"/>
+                <a:cs typeface="Arial"/>
+              </a:rPr>
               <a:t xml:space="preserve">passage needs its exception, and why the</a:t>
             </a:r>
             <a:endParaRPr lang="en-US" sz="1500"/>
@@ -12777,7 +12823,7 @@
                 <a:ea typeface="Arial"/>
                 <a:cs typeface="Arial"/>
               </a:rPr>
-              <a:t xml:space="preserve">Your Eval Suite Has a Grandfather</a:t>
+              <a:t xml:space="preserve">Three Search Methods in a Fundable Trenchcoat</a:t>
             </a:r>
             <a:endParaRPr lang="en-US" sz="975"/>
           </a:p>

--- a/artifacts/speaking-portfolio-expanded/decks/retrieval-15min-handout.pptx
+++ b/artifacts/speaking-portfolio-expanded/decks/retrieval-15min-handout.pptx
@@ -2758,7 +2758,7 @@
                 <a:ea typeface="Arial"/>
                 <a:cs typeface="Arial"/>
               </a:rPr>
-              <a:t xml:space="preserve">TREC used pooling because judging every document for every query was impractical. Zobel investigated reliability with incomplete judgments. The risk is real; universal failure is not. In a 2022 recheck, Voorhees, Soboroff, and Lin expanded TREC-8 judgments and found system-rank correlations above point nine nine. Deep, diverse pools had held up.</a:t>
+              <a:t xml:space="preserve">TREC used pooling because judging every document for every query was impractical. Zobel investigated reliability with incomplete judgments. The risk is real; universal failure is not. In a 2022 recheck, Voorhees, Soboroff, and Lin added judgments to TREC-8 and compared how the systems ranked before and after. The ordering barely moved. Deep, diverse pools had held up.</a:t>
             </a:r>
             <a:endParaRPr lang="en-US" sz="1200"/>
           </a:p>
@@ -3858,7 +3858,7 @@
                 <a:ea typeface="Arial"/>
                 <a:cs typeface="Arial"/>
               </a:rPr>
-              <a:t xml:space="preserve">Evaluate the handoff. Did retrieval find B and F? Did context assembly keep their relationship? Did the answer cite the actual exception? If the answer is wrong, those checks locate the failure instead of blaming the nearest model. IR also studied machine consumers before modern RAG; the change here is this particular generative handoff and its failure modes.</a:t>
+              <a:t xml:space="preserve">Evaluate the handoff. Did retrieval find B and F? Did context assembly keep their relationship? Did the answer cite the actual exception? If the answer is wrong, those checks locate the failure instead of blaming the nearest model.</a:t>
             </a:r>
             <a:endParaRPr lang="en-US" sz="1200"/>
           </a:p>
@@ -4155,7 +4155,7 @@
                 <a:ea typeface="Arial"/>
                 <a:cs typeface="Arial"/>
               </a:rPr>
-              <a:t xml:space="preserve">Three search methods in a fundable trenchcoat.</a:t>
+              <a:t xml:space="preserve">Three search methods. One instrument nobody checked.</a:t>
             </a:r>
             <a:endParaRPr lang="en-US" sz="1200"/>
           </a:p>
@@ -4339,99 +4339,99 @@
                 <a:ea typeface="Arial"/>
                 <a:cs typeface="Arial"/>
               </a:rPr>
-              <a:t xml:space="preserve">Sixty years since the Cranfield report. The field did not just build evaluations. It investigated when they could be trusted. Go find the documents your eval set never judged.</a:t>
-            </a:r>
-            <a:endParaRPr lang="en-US" sz="1200"/>
-          </a:p>
-          <a:p>
-            <a:pPr marL="0" indent="0">
-              <a:lnSpc>
-                <a:spcPts val="1560"/>
-              </a:lnSpc>
-              <a:spcAft>
-                <a:spcPts val="0"/>
-              </a:spcAft>
-              <a:buNone/>
-            </a:pPr>
-            <a:r>
-              <a:rPr lang="en-US" sz="1200" b="0">
-                <a:solidFill>
-                  <a:srgbClr val="202b33"/>
-                </a:solidFill>
-                <a:latin typeface="Arial"/>
-                <a:ea typeface="Arial"/>
-                <a:cs typeface="Arial"/>
-              </a:rPr>
-              <a:t xml:space="preserve"/>
-            </a:r>
-            <a:endParaRPr lang="en-US" sz="1200"/>
-          </a:p>
-          <a:p>
-            <a:pPr marL="0" indent="0">
-              <a:lnSpc>
-                <a:spcPts val="1560"/>
-              </a:lnSpc>
-              <a:spcAft>
-                <a:spcPts val="0"/>
-              </a:spcAft>
-              <a:buNone/>
-            </a:pPr>
-            <a:r>
-              <a:rPr lang="en-US" sz="1200" b="0">
-                <a:solidFill>
-                  <a:srgbClr val="202b33"/>
-                </a:solidFill>
-                <a:latin typeface="Arial"/>
-                <a:ea typeface="Arial"/>
-                <a:cs typeface="Arial"/>
-              </a:rPr>
-              <a:t xml:space="preserve"/>
-            </a:r>
-            <a:endParaRPr lang="en-US" sz="1200"/>
-          </a:p>
-          <a:p>
-            <a:pPr marL="0" indent="0">
-              <a:lnSpc>
-                <a:spcPts val="1560"/>
-              </a:lnSpc>
-              <a:spcAft>
-                <a:spcPts val="0"/>
-              </a:spcAft>
-              <a:buNone/>
-            </a:pPr>
-            <a:r>
-              <a:rPr lang="en-US" sz="1200" b="0">
-                <a:solidFill>
-                  <a:srgbClr val="202b33"/>
-                </a:solidFill>
-                <a:latin typeface="Arial"/>
-                <a:ea typeface="Arial"/>
-                <a:cs typeface="Arial"/>
-              </a:rPr>
-              <a:t xml:space="preserve"/>
-            </a:r>
-            <a:endParaRPr lang="en-US" sz="1200"/>
-          </a:p>
-          <a:p>
-            <a:pPr marL="0" indent="0">
-              <a:lnSpc>
-                <a:spcPts val="1560"/>
-              </a:lnSpc>
-              <a:spcAft>
-                <a:spcPts val="0"/>
-              </a:spcAft>
-              <a:buNone/>
-            </a:pPr>
-            <a:r>
-              <a:rPr lang="en-US" sz="1200" b="0">
-                <a:solidFill>
-                  <a:srgbClr val="202b33"/>
-                </a:solidFill>
-                <a:latin typeface="Arial"/>
-                <a:ea typeface="Arial"/>
-                <a:cs typeface="Arial"/>
-              </a:rPr>
-              <a:t xml:space="preserve">Leave the B/F example up during questions. Keep all eight terms in the notes; the screen closes on the instruction.</a:t>
+              <a:t xml:space="preserve">Three search methods in a fundable trenchcoat. That is a fair joke about the retriever, and the coat is not the problem. Lexical, dense, hybrid: we inherited all three. What we left behind was the sixty years of checking whether the score underneath was telling the truth. Go find the documents your eval set never judged.</a:t>
+            </a:r>
+            <a:endParaRPr lang="en-US" sz="1200"/>
+          </a:p>
+          <a:p>
+            <a:pPr marL="0" indent="0">
+              <a:lnSpc>
+                <a:spcPts val="1560"/>
+              </a:lnSpc>
+              <a:spcAft>
+                <a:spcPts val="0"/>
+              </a:spcAft>
+              <a:buNone/>
+            </a:pPr>
+            <a:r>
+              <a:rPr lang="en-US" sz="1200" b="0">
+                <a:solidFill>
+                  <a:srgbClr val="202b33"/>
+                </a:solidFill>
+                <a:latin typeface="Arial"/>
+                <a:ea typeface="Arial"/>
+                <a:cs typeface="Arial"/>
+              </a:rPr>
+              <a:t xml:space="preserve"/>
+            </a:r>
+            <a:endParaRPr lang="en-US" sz="1200"/>
+          </a:p>
+          <a:p>
+            <a:pPr marL="0" indent="0">
+              <a:lnSpc>
+                <a:spcPts val="1560"/>
+              </a:lnSpc>
+              <a:spcAft>
+                <a:spcPts val="0"/>
+              </a:spcAft>
+              <a:buNone/>
+            </a:pPr>
+            <a:r>
+              <a:rPr lang="en-US" sz="1200" b="0">
+                <a:solidFill>
+                  <a:srgbClr val="202b33"/>
+                </a:solidFill>
+                <a:latin typeface="Arial"/>
+                <a:ea typeface="Arial"/>
+                <a:cs typeface="Arial"/>
+              </a:rPr>
+              <a:t xml:space="preserve"/>
+            </a:r>
+            <a:endParaRPr lang="en-US" sz="1200"/>
+          </a:p>
+          <a:p>
+            <a:pPr marL="0" indent="0">
+              <a:lnSpc>
+                <a:spcPts val="1560"/>
+              </a:lnSpc>
+              <a:spcAft>
+                <a:spcPts val="0"/>
+              </a:spcAft>
+              <a:buNone/>
+            </a:pPr>
+            <a:r>
+              <a:rPr lang="en-US" sz="1200" b="0">
+                <a:solidFill>
+                  <a:srgbClr val="202b33"/>
+                </a:solidFill>
+                <a:latin typeface="Arial"/>
+                <a:ea typeface="Arial"/>
+                <a:cs typeface="Arial"/>
+              </a:rPr>
+              <a:t xml:space="preserve"/>
+            </a:r>
+            <a:endParaRPr lang="en-US" sz="1200"/>
+          </a:p>
+          <a:p>
+            <a:pPr marL="0" indent="0">
+              <a:lnSpc>
+                <a:spcPts val="1560"/>
+              </a:lnSpc>
+              <a:spcAft>
+                <a:spcPts val="0"/>
+              </a:spcAft>
+              <a:buNone/>
+            </a:pPr>
+            <a:r>
+              <a:rPr lang="en-US" sz="1200" b="0">
+                <a:solidFill>
+                  <a:srgbClr val="202b33"/>
+                </a:solidFill>
+                <a:latin typeface="Arial"/>
+                <a:ea typeface="Arial"/>
+                <a:cs typeface="Arial"/>
+              </a:rPr>
+              <a:t xml:space="preserve">Say the title line once, flat, then drop to the instruction. Leave the B/F example up during questions. Keep all eight terms in the notes; the screen closes on the instruction.</a:t>
             </a:r>
             <a:endParaRPr lang="en-US" sz="1200"/>
           </a:p>
@@ -8514,7 +8514,7 @@
       </p:sp>
       <p:pic>
         <p:nvPicPr>
-          <p:cNvPr id="5" name="3d65c12ae661fd9ad5ccfdb4af281d085e0dc1608a0306f237db7921c07bcdad" descr="Cranfield, Bedfordshire, 1966"/>
+          <p:cNvPr id="5" name="a6b4d212c36d475ddccc3e605d3fe5942640332d496970d4988bbc2917bbc042" descr="Cranfield, Bedfordshire, 1966"/>
           <p:cNvPicPr>
             <a:picLocks noChangeAspect="1"/>
           </p:cNvPicPr>
@@ -9280,7 +9280,7 @@
                 <a:ea typeface="Arial"/>
                 <a:cs typeface="Arial"/>
               </a:rPr>
-              <a:t xml:space="preserve">Demo: the hole in the golden set</a:t>
+              <a:t xml:space="preserve">Fool's Golden Dataset</a:t>
             </a:r>
             <a:endParaRPr lang="en-US" sz="2550"/>
           </a:p>
@@ -9724,6 +9724,29 @@
             </a:r>
             <a:endParaRPr lang="en-US" sz="1500"/>
           </a:p>
+          <a:p>
+            <a:pPr marL="0" indent="0">
+              <a:lnSpc>
+                <a:spcPts val="1950"/>
+              </a:lnSpc>
+              <a:spcAft>
+                <a:spcPts val="0"/>
+              </a:spcAft>
+              <a:buNone/>
+            </a:pPr>
+            <a:r>
+              <a:rPr lang="en-US" sz="1500" b="0">
+                <a:solidFill>
+                  <a:srgbClr val="202B33"/>
+                </a:solidFill>
+                <a:latin typeface="Arial"/>
+                <a:ea typeface="Arial"/>
+                <a:cs typeface="Arial"/>
+              </a:rPr>
+              <a:t xml:space="preserve">Judge F under the same rubric and the new</a:t>
+            </a:r>
+            <a:endParaRPr lang="en-US" sz="1500"/>
+          </a:p>
         </p:txBody>
       </p:sp>
       <p:sp>
@@ -9769,29 +9792,6 @@
                 <a:ea typeface="Arial"/>
                 <a:cs typeface="Arial"/>
               </a:rPr>
-              <a:t xml:space="preserve">Judge F under the same rubric and the new</a:t>
-            </a:r>
-            <a:endParaRPr lang="en-US" sz="1500"/>
-          </a:p>
-          <a:p>
-            <a:pPr marL="0" indent="0">
-              <a:lnSpc>
-                <a:spcPts val="1950"/>
-              </a:lnSpc>
-              <a:spcAft>
-                <a:spcPts val="0"/>
-              </a:spcAft>
-              <a:buNone/>
-            </a:pPr>
-            <a:r>
-              <a:rPr lang="en-US" sz="1500" b="0">
-                <a:solidFill>
-                  <a:srgbClr val="202B33"/>
-                </a:solidFill>
-                <a:latin typeface="Arial"/>
-                <a:ea typeface="Arial"/>
-                <a:cs typeface="Arial"/>
-              </a:rPr>
               <a:t xml:space="preserve">run returns to one. We changed no retrieval</a:t>
             </a:r>
             <a:endParaRPr lang="en-US" sz="1500"/>
@@ -9976,76 +9976,99 @@
                 <a:ea typeface="Arial"/>
                 <a:cs typeface="Arial"/>
               </a:rPr>
-              <a:t xml:space="preserve">recheck, Voorhees, Soboroff, and Lin</a:t>
-            </a:r>
-            <a:endParaRPr lang="en-US" sz="1500"/>
-          </a:p>
-          <a:p>
-            <a:pPr marL="0" indent="0">
-              <a:lnSpc>
-                <a:spcPts val="1950"/>
-              </a:lnSpc>
-              <a:spcAft>
-                <a:spcPts val="0"/>
-              </a:spcAft>
-              <a:buNone/>
-            </a:pPr>
-            <a:r>
-              <a:rPr lang="en-US" sz="1500" b="0">
-                <a:solidFill>
-                  <a:srgbClr val="202B33"/>
-                </a:solidFill>
-                <a:latin typeface="Arial"/>
-                <a:ea typeface="Arial"/>
-                <a:cs typeface="Arial"/>
-              </a:rPr>
-              <a:t xml:space="preserve">expanded TREC-8 judgments and found</a:t>
-            </a:r>
-            <a:endParaRPr lang="en-US" sz="1500"/>
-          </a:p>
-          <a:p>
-            <a:pPr marL="0" indent="0">
-              <a:lnSpc>
-                <a:spcPts val="1950"/>
-              </a:lnSpc>
-              <a:spcAft>
-                <a:spcPts val="0"/>
-              </a:spcAft>
-              <a:buNone/>
-            </a:pPr>
-            <a:r>
-              <a:rPr lang="en-US" sz="1500" b="0">
-                <a:solidFill>
-                  <a:srgbClr val="202B33"/>
-                </a:solidFill>
-                <a:latin typeface="Arial"/>
-                <a:ea typeface="Arial"/>
-                <a:cs typeface="Arial"/>
-              </a:rPr>
-              <a:t xml:space="preserve">system-rank correlations above point nine</a:t>
-            </a:r>
-            <a:endParaRPr lang="en-US" sz="1500"/>
-          </a:p>
-          <a:p>
-            <a:pPr marL="0" indent="0">
-              <a:lnSpc>
-                <a:spcPts val="1950"/>
-              </a:lnSpc>
-              <a:spcAft>
-                <a:spcPts val="0"/>
-              </a:spcAft>
-              <a:buNone/>
-            </a:pPr>
-            <a:r>
-              <a:rPr lang="en-US" sz="1500" b="0">
-                <a:solidFill>
-                  <a:srgbClr val="202B33"/>
-                </a:solidFill>
-                <a:latin typeface="Arial"/>
-                <a:ea typeface="Arial"/>
-                <a:cs typeface="Arial"/>
-              </a:rPr>
-              <a:t xml:space="preserve">nine. Deep, diverse pools had held up.</a:t>
+              <a:t xml:space="preserve">recheck, Voorhees, Soboroff, and Lin added</a:t>
+            </a:r>
+            <a:endParaRPr lang="en-US" sz="1500"/>
+          </a:p>
+          <a:p>
+            <a:pPr marL="0" indent="0">
+              <a:lnSpc>
+                <a:spcPts val="1950"/>
+              </a:lnSpc>
+              <a:spcAft>
+                <a:spcPts val="0"/>
+              </a:spcAft>
+              <a:buNone/>
+            </a:pPr>
+            <a:r>
+              <a:rPr lang="en-US" sz="1500" b="0">
+                <a:solidFill>
+                  <a:srgbClr val="202B33"/>
+                </a:solidFill>
+                <a:latin typeface="Arial"/>
+                <a:ea typeface="Arial"/>
+                <a:cs typeface="Arial"/>
+              </a:rPr>
+              <a:t xml:space="preserve">judgments to TREC-8 and compared how the</a:t>
+            </a:r>
+            <a:endParaRPr lang="en-US" sz="1500"/>
+          </a:p>
+          <a:p>
+            <a:pPr marL="0" indent="0">
+              <a:lnSpc>
+                <a:spcPts val="1950"/>
+              </a:lnSpc>
+              <a:spcAft>
+                <a:spcPts val="0"/>
+              </a:spcAft>
+              <a:buNone/>
+            </a:pPr>
+            <a:r>
+              <a:rPr lang="en-US" sz="1500" b="0">
+                <a:solidFill>
+                  <a:srgbClr val="202B33"/>
+                </a:solidFill>
+                <a:latin typeface="Arial"/>
+                <a:ea typeface="Arial"/>
+                <a:cs typeface="Arial"/>
+              </a:rPr>
+              <a:t xml:space="preserve">systems ranked before and after. The</a:t>
+            </a:r>
+            <a:endParaRPr lang="en-US" sz="1500"/>
+          </a:p>
+          <a:p>
+            <a:pPr marL="0" indent="0">
+              <a:lnSpc>
+                <a:spcPts val="1950"/>
+              </a:lnSpc>
+              <a:spcAft>
+                <a:spcPts val="0"/>
+              </a:spcAft>
+              <a:buNone/>
+            </a:pPr>
+            <a:r>
+              <a:rPr lang="en-US" sz="1500" b="0">
+                <a:solidFill>
+                  <a:srgbClr val="202B33"/>
+                </a:solidFill>
+                <a:latin typeface="Arial"/>
+                <a:ea typeface="Arial"/>
+                <a:cs typeface="Arial"/>
+              </a:rPr>
+              <a:t xml:space="preserve">ordering barely moved. Deep, diverse pools</a:t>
+            </a:r>
+            <a:endParaRPr lang="en-US" sz="1500"/>
+          </a:p>
+          <a:p>
+            <a:pPr marL="0" indent="0">
+              <a:lnSpc>
+                <a:spcPts val="1950"/>
+              </a:lnSpc>
+              <a:spcAft>
+                <a:spcPts val="0"/>
+              </a:spcAft>
+              <a:buNone/>
+            </a:pPr>
+            <a:r>
+              <a:rPr lang="en-US" sz="1500" b="0">
+                <a:solidFill>
+                  <a:srgbClr val="202B33"/>
+                </a:solidFill>
+                <a:latin typeface="Arial"/>
+                <a:ea typeface="Arial"/>
+                <a:cs typeface="Arial"/>
+              </a:rPr>
+              <a:t xml:space="preserve">had held up.</a:t>
             </a:r>
             <a:endParaRPr lang="en-US" sz="1500"/>
           </a:p>
@@ -11291,7 +11314,7 @@
                 <a:ea typeface="Arial"/>
                 <a:cs typeface="Arial"/>
               </a:rPr>
-              <a:t xml:space="preserve">What changed: the next reader is a generator</a:t>
+              <a:t xml:space="preserve">The Reader Stopped Being a Person</a:t>
             </a:r>
             <a:endParaRPr lang="en-US" sz="2550"/>
           </a:p>
@@ -11620,29 +11643,6 @@
             </a:r>
             <a:endParaRPr lang="en-US" sz="1500"/>
           </a:p>
-          <a:p>
-            <a:pPr marL="0" indent="0">
-              <a:lnSpc>
-                <a:spcPts val="1950"/>
-              </a:lnSpc>
-              <a:spcAft>
-                <a:spcPts val="0"/>
-              </a:spcAft>
-              <a:buNone/>
-            </a:pPr>
-            <a:r>
-              <a:rPr lang="en-US" sz="1500" b="0">
-                <a:solidFill>
-                  <a:srgbClr val="202B33"/>
-                </a:solidFill>
-                <a:latin typeface="Arial"/>
-                <a:ea typeface="Arial"/>
-                <a:cs typeface="Arial"/>
-              </a:rPr>
-              <a:t xml:space="preserve">into that system. We cannot infer that it</a:t>
-            </a:r>
-            <a:endParaRPr lang="en-US" sz="1500"/>
-          </a:p>
         </p:txBody>
       </p:sp>
       <p:sp>
@@ -11688,6 +11688,29 @@
                 <a:ea typeface="Arial"/>
                 <a:cs typeface="Arial"/>
               </a:rPr>
+              <a:t xml:space="preserve">into that system. We cannot infer that it</a:t>
+            </a:r>
+            <a:endParaRPr lang="en-US" sz="1500"/>
+          </a:p>
+          <a:p>
+            <a:pPr marL="0" indent="0">
+              <a:lnSpc>
+                <a:spcPts val="1950"/>
+              </a:lnSpc>
+              <a:spcAft>
+                <a:spcPts val="0"/>
+              </a:spcAft>
+              <a:buNone/>
+            </a:pPr>
+            <a:r>
+              <a:rPr lang="en-US" sz="1500" b="0">
+                <a:solidFill>
+                  <a:srgbClr val="202B33"/>
+                </a:solidFill>
+                <a:latin typeface="Arial"/>
+                <a:ea typeface="Arial"/>
+                <a:cs typeface="Arial"/>
+              </a:rPr>
               <a:t xml:space="preserve">will use them from a good retrieval score.</a:t>
             </a:r>
             <a:endParaRPr lang="en-US" sz="1500"/>
@@ -11918,76 +11941,7 @@
                 <a:ea typeface="Arial"/>
                 <a:cs typeface="Arial"/>
               </a:rPr>
-              <a:t xml:space="preserve">blaming the nearest model. IR also studied</a:t>
-            </a:r>
-            <a:endParaRPr lang="en-US" sz="1500"/>
-          </a:p>
-          <a:p>
-            <a:pPr marL="0" indent="0">
-              <a:lnSpc>
-                <a:spcPts val="1950"/>
-              </a:lnSpc>
-              <a:spcAft>
-                <a:spcPts val="0"/>
-              </a:spcAft>
-              <a:buNone/>
-            </a:pPr>
-            <a:r>
-              <a:rPr lang="en-US" sz="1500" b="0">
-                <a:solidFill>
-                  <a:srgbClr val="202B33"/>
-                </a:solidFill>
-                <a:latin typeface="Arial"/>
-                <a:ea typeface="Arial"/>
-                <a:cs typeface="Arial"/>
-              </a:rPr>
-              <a:t xml:space="preserve">machine consumers before modern RAG; the</a:t>
-            </a:r>
-            <a:endParaRPr lang="en-US" sz="1500"/>
-          </a:p>
-          <a:p>
-            <a:pPr marL="0" indent="0">
-              <a:lnSpc>
-                <a:spcPts val="1950"/>
-              </a:lnSpc>
-              <a:spcAft>
-                <a:spcPts val="0"/>
-              </a:spcAft>
-              <a:buNone/>
-            </a:pPr>
-            <a:r>
-              <a:rPr lang="en-US" sz="1500" b="0">
-                <a:solidFill>
-                  <a:srgbClr val="202B33"/>
-                </a:solidFill>
-                <a:latin typeface="Arial"/>
-                <a:ea typeface="Arial"/>
-                <a:cs typeface="Arial"/>
-              </a:rPr>
-              <a:t xml:space="preserve">change here is this particular generative</a:t>
-            </a:r>
-            <a:endParaRPr lang="en-US" sz="1500"/>
-          </a:p>
-          <a:p>
-            <a:pPr marL="0" indent="0">
-              <a:lnSpc>
-                <a:spcPts val="1950"/>
-              </a:lnSpc>
-              <a:spcAft>
-                <a:spcPts val="0"/>
-              </a:spcAft>
-              <a:buNone/>
-            </a:pPr>
-            <a:r>
-              <a:rPr lang="en-US" sz="1500" b="0">
-                <a:solidFill>
-                  <a:srgbClr val="202B33"/>
-                </a:solidFill>
-                <a:latin typeface="Arial"/>
-                <a:ea typeface="Arial"/>
-                <a:cs typeface="Arial"/>
-              </a:rPr>
-              <a:t xml:space="preserve">handoff and its failure modes.</a:t>
+              <a:t xml:space="preserve">blaming the nearest model.</a:t>
             </a:r>
             <a:endParaRPr lang="en-US" sz="1500"/>
           </a:p>
@@ -12265,30 +12219,30 @@
                 <a:ea typeface="Arial"/>
                 <a:cs typeface="Arial"/>
               </a:rPr>
-              <a:t xml:space="preserve">Three search methods in a fundable</a:t>
-            </a:r>
-            <a:endParaRPr lang="en-US" sz="1500"/>
-          </a:p>
-          <a:p>
-            <a:pPr marL="0" indent="0">
-              <a:lnSpc>
-                <a:spcPts val="1950"/>
-              </a:lnSpc>
-              <a:spcAft>
-                <a:spcPts val="0"/>
-              </a:spcAft>
-              <a:buNone/>
-            </a:pPr>
-            <a:r>
-              <a:rPr lang="en-US" sz="1500" b="0">
-                <a:solidFill>
-                  <a:srgbClr val="202B33"/>
-                </a:solidFill>
-                <a:latin typeface="Arial"/>
-                <a:ea typeface="Arial"/>
-                <a:cs typeface="Arial"/>
-              </a:rPr>
-              <a:t xml:space="preserve">trenchcoat.</a:t>
+              <a:t xml:space="preserve">Three search methods. One instrument nobody</a:t>
+            </a:r>
+            <a:endParaRPr lang="en-US" sz="1500"/>
+          </a:p>
+          <a:p>
+            <a:pPr marL="0" indent="0">
+              <a:lnSpc>
+                <a:spcPts val="1950"/>
+              </a:lnSpc>
+              <a:spcAft>
+                <a:spcPts val="0"/>
+              </a:spcAft>
+              <a:buNone/>
+            </a:pPr>
+            <a:r>
+              <a:rPr lang="en-US" sz="1500" b="0">
+                <a:solidFill>
+                  <a:srgbClr val="202B33"/>
+                </a:solidFill>
+                <a:latin typeface="Arial"/>
+                <a:ea typeface="Arial"/>
+                <a:cs typeface="Arial"/>
+              </a:rPr>
+              <a:t xml:space="preserve">checked.</a:t>
             </a:r>
             <a:endParaRPr lang="en-US" sz="1500"/>
           </a:p>
@@ -12496,6 +12450,52 @@
                 <a:cs typeface="Arial"/>
               </a:rPr>
               <a:t xml:space="preserve">Those words tell us why rare identifiers</a:t>
+            </a:r>
+            <a:endParaRPr lang="en-US" sz="1500"/>
+          </a:p>
+          <a:p>
+            <a:pPr marL="0" indent="0">
+              <a:lnSpc>
+                <a:spcPts val="1950"/>
+              </a:lnSpc>
+              <a:spcAft>
+                <a:spcPts val="0"/>
+              </a:spcAft>
+              <a:buNone/>
+            </a:pPr>
+            <a:r>
+              <a:rPr lang="en-US" sz="1500" b="0">
+                <a:solidFill>
+                  <a:srgbClr val="202B33"/>
+                </a:solidFill>
+                <a:latin typeface="Arial"/>
+                <a:ea typeface="Arial"/>
+                <a:cs typeface="Arial"/>
+              </a:rPr>
+              <a:t xml:space="preserve">matter, why synonyms are hard, why a</a:t>
+            </a:r>
+            <a:endParaRPr lang="en-US" sz="1500"/>
+          </a:p>
+          <a:p>
+            <a:pPr marL="0" indent="0">
+              <a:lnSpc>
+                <a:spcPts val="1950"/>
+              </a:lnSpc>
+              <a:spcAft>
+                <a:spcPts val="0"/>
+              </a:spcAft>
+              <a:buNone/>
+            </a:pPr>
+            <a:r>
+              <a:rPr lang="en-US" sz="1500" b="0">
+                <a:solidFill>
+                  <a:srgbClr val="202B33"/>
+                </a:solidFill>
+                <a:latin typeface="Arial"/>
+                <a:ea typeface="Arial"/>
+                <a:cs typeface="Arial"/>
+              </a:rPr>
+              <a:t xml:space="preserve">passage needs its exception, and why the</a:t>
             </a:r>
             <a:endParaRPr lang="en-US" sz="1500"/>
           </a:p>
@@ -12544,52 +12544,6 @@
                 <a:ea typeface="Arial"/>
                 <a:cs typeface="Arial"/>
               </a:rPr>
-              <a:t xml:space="preserve">matter, why synonyms are hard, why a</a:t>
-            </a:r>
-            <a:endParaRPr lang="en-US" sz="1500"/>
-          </a:p>
-          <a:p>
-            <a:pPr marL="0" indent="0">
-              <a:lnSpc>
-                <a:spcPts val="1950"/>
-              </a:lnSpc>
-              <a:spcAft>
-                <a:spcPts val="0"/>
-              </a:spcAft>
-              <a:buNone/>
-            </a:pPr>
-            <a:r>
-              <a:rPr lang="en-US" sz="1500" b="0">
-                <a:solidFill>
-                  <a:srgbClr val="202B33"/>
-                </a:solidFill>
-                <a:latin typeface="Arial"/>
-                <a:ea typeface="Arial"/>
-                <a:cs typeface="Arial"/>
-              </a:rPr>
-              <a:t xml:space="preserve">passage needs its exception, and why the</a:t>
-            </a:r>
-            <a:endParaRPr lang="en-US" sz="1500"/>
-          </a:p>
-          <a:p>
-            <a:pPr marL="0" indent="0">
-              <a:lnSpc>
-                <a:spcPts val="1950"/>
-              </a:lnSpc>
-              <a:spcAft>
-                <a:spcPts val="0"/>
-              </a:spcAft>
-              <a:buNone/>
-            </a:pPr>
-            <a:r>
-              <a:rPr lang="en-US" sz="1500" b="0">
-                <a:solidFill>
-                  <a:srgbClr val="202B33"/>
-                </a:solidFill>
-                <a:latin typeface="Arial"/>
-                <a:ea typeface="Arial"/>
-                <a:cs typeface="Arial"/>
-              </a:rPr>
               <a:t xml:space="preserve">score depends on who judged which</a:t>
             </a:r>
             <a:endParaRPr lang="en-US" sz="1500"/>
@@ -12682,99 +12636,168 @@
                 <a:ea typeface="Arial"/>
                 <a:cs typeface="Arial"/>
               </a:rPr>
-              <a:t xml:space="preserve">Sixty years since the Cranfield report. The</a:t>
-            </a:r>
-            <a:endParaRPr lang="en-US" sz="1500"/>
-          </a:p>
-          <a:p>
-            <a:pPr marL="0" indent="0">
-              <a:lnSpc>
-                <a:spcPts val="1950"/>
-              </a:lnSpc>
-              <a:spcAft>
-                <a:spcPts val="0"/>
-              </a:spcAft>
-              <a:buNone/>
-            </a:pPr>
-            <a:r>
-              <a:rPr lang="en-US" sz="1500" b="0">
-                <a:solidFill>
-                  <a:srgbClr val="202B33"/>
-                </a:solidFill>
-                <a:latin typeface="Arial"/>
-                <a:ea typeface="Arial"/>
-                <a:cs typeface="Arial"/>
-              </a:rPr>
-              <a:t xml:space="preserve">field did not just build evaluations. It</a:t>
-            </a:r>
-            <a:endParaRPr lang="en-US" sz="1500"/>
-          </a:p>
-          <a:p>
-            <a:pPr marL="0" indent="0">
-              <a:lnSpc>
-                <a:spcPts val="1950"/>
-              </a:lnSpc>
-              <a:spcAft>
-                <a:spcPts val="0"/>
-              </a:spcAft>
-              <a:buNone/>
-            </a:pPr>
-            <a:r>
-              <a:rPr lang="en-US" sz="1500" b="0">
-                <a:solidFill>
-                  <a:srgbClr val="202B33"/>
-                </a:solidFill>
-                <a:latin typeface="Arial"/>
-                <a:ea typeface="Arial"/>
-                <a:cs typeface="Arial"/>
-              </a:rPr>
-              <a:t xml:space="preserve">investigated when they could be trusted. Go</a:t>
-            </a:r>
-            <a:endParaRPr lang="en-US" sz="1500"/>
-          </a:p>
-          <a:p>
-            <a:pPr marL="0" indent="0">
-              <a:lnSpc>
-                <a:spcPts val="1950"/>
-              </a:lnSpc>
-              <a:spcAft>
-                <a:spcPts val="0"/>
-              </a:spcAft>
-              <a:buNone/>
-            </a:pPr>
-            <a:r>
-              <a:rPr lang="en-US" sz="1500" b="0">
-                <a:solidFill>
-                  <a:srgbClr val="202B33"/>
-                </a:solidFill>
-                <a:latin typeface="Arial"/>
-                <a:ea typeface="Arial"/>
-                <a:cs typeface="Arial"/>
-              </a:rPr>
-              <a:t xml:space="preserve">find the documents your eval set never</a:t>
-            </a:r>
-            <a:endParaRPr lang="en-US" sz="1500"/>
-          </a:p>
-          <a:p>
-            <a:pPr marL="0" indent="0">
-              <a:lnSpc>
-                <a:spcPts val="1950"/>
-              </a:lnSpc>
-              <a:spcAft>
-                <a:spcPts val="0"/>
-              </a:spcAft>
-              <a:buNone/>
-            </a:pPr>
-            <a:r>
-              <a:rPr lang="en-US" sz="1500" b="0">
-                <a:solidFill>
-                  <a:srgbClr val="202B33"/>
-                </a:solidFill>
-                <a:latin typeface="Arial"/>
-                <a:ea typeface="Arial"/>
-                <a:cs typeface="Arial"/>
-              </a:rPr>
-              <a:t xml:space="preserve">judged.</a:t>
+              <a:t xml:space="preserve">Three search methods in a fundable</a:t>
+            </a:r>
+            <a:endParaRPr lang="en-US" sz="1500"/>
+          </a:p>
+          <a:p>
+            <a:pPr marL="0" indent="0">
+              <a:lnSpc>
+                <a:spcPts val="1950"/>
+              </a:lnSpc>
+              <a:spcAft>
+                <a:spcPts val="0"/>
+              </a:spcAft>
+              <a:buNone/>
+            </a:pPr>
+            <a:r>
+              <a:rPr lang="en-US" sz="1500" b="0">
+                <a:solidFill>
+                  <a:srgbClr val="202B33"/>
+                </a:solidFill>
+                <a:latin typeface="Arial"/>
+                <a:ea typeface="Arial"/>
+                <a:cs typeface="Arial"/>
+              </a:rPr>
+              <a:t xml:space="preserve">trenchcoat. That is a fair joke about the</a:t>
+            </a:r>
+            <a:endParaRPr lang="en-US" sz="1500"/>
+          </a:p>
+          <a:p>
+            <a:pPr marL="0" indent="0">
+              <a:lnSpc>
+                <a:spcPts val="1950"/>
+              </a:lnSpc>
+              <a:spcAft>
+                <a:spcPts val="0"/>
+              </a:spcAft>
+              <a:buNone/>
+            </a:pPr>
+            <a:r>
+              <a:rPr lang="en-US" sz="1500" b="0">
+                <a:solidFill>
+                  <a:srgbClr val="202B33"/>
+                </a:solidFill>
+                <a:latin typeface="Arial"/>
+                <a:ea typeface="Arial"/>
+                <a:cs typeface="Arial"/>
+              </a:rPr>
+              <a:t xml:space="preserve">retriever, and the coat is not the problem.</a:t>
+            </a:r>
+            <a:endParaRPr lang="en-US" sz="1500"/>
+          </a:p>
+          <a:p>
+            <a:pPr marL="0" indent="0">
+              <a:lnSpc>
+                <a:spcPts val="1950"/>
+              </a:lnSpc>
+              <a:spcAft>
+                <a:spcPts val="0"/>
+              </a:spcAft>
+              <a:buNone/>
+            </a:pPr>
+            <a:r>
+              <a:rPr lang="en-US" sz="1500" b="0">
+                <a:solidFill>
+                  <a:srgbClr val="202B33"/>
+                </a:solidFill>
+                <a:latin typeface="Arial"/>
+                <a:ea typeface="Arial"/>
+                <a:cs typeface="Arial"/>
+              </a:rPr>
+              <a:t xml:space="preserve">Lexical, dense, hybrid: we inherited all</a:t>
+            </a:r>
+            <a:endParaRPr lang="en-US" sz="1500"/>
+          </a:p>
+          <a:p>
+            <a:pPr marL="0" indent="0">
+              <a:lnSpc>
+                <a:spcPts val="1950"/>
+              </a:lnSpc>
+              <a:spcAft>
+                <a:spcPts val="0"/>
+              </a:spcAft>
+              <a:buNone/>
+            </a:pPr>
+            <a:r>
+              <a:rPr lang="en-US" sz="1500" b="0">
+                <a:solidFill>
+                  <a:srgbClr val="202B33"/>
+                </a:solidFill>
+                <a:latin typeface="Arial"/>
+                <a:ea typeface="Arial"/>
+                <a:cs typeface="Arial"/>
+              </a:rPr>
+              <a:t xml:space="preserve">three. What we left behind was the sixty</a:t>
+            </a:r>
+            <a:endParaRPr lang="en-US" sz="1500"/>
+          </a:p>
+          <a:p>
+            <a:pPr marL="0" indent="0">
+              <a:lnSpc>
+                <a:spcPts val="1950"/>
+              </a:lnSpc>
+              <a:spcAft>
+                <a:spcPts val="0"/>
+              </a:spcAft>
+              <a:buNone/>
+            </a:pPr>
+            <a:r>
+              <a:rPr lang="en-US" sz="1500" b="0">
+                <a:solidFill>
+                  <a:srgbClr val="202B33"/>
+                </a:solidFill>
+                <a:latin typeface="Arial"/>
+                <a:ea typeface="Arial"/>
+                <a:cs typeface="Arial"/>
+              </a:rPr>
+              <a:t xml:space="preserve">years of checking whether the score</a:t>
+            </a:r>
+            <a:endParaRPr lang="en-US" sz="1500"/>
+          </a:p>
+          <a:p>
+            <a:pPr marL="0" indent="0">
+              <a:lnSpc>
+                <a:spcPts val="1950"/>
+              </a:lnSpc>
+              <a:spcAft>
+                <a:spcPts val="0"/>
+              </a:spcAft>
+              <a:buNone/>
+            </a:pPr>
+            <a:r>
+              <a:rPr lang="en-US" sz="1500" b="0">
+                <a:solidFill>
+                  <a:srgbClr val="202B33"/>
+                </a:solidFill>
+                <a:latin typeface="Arial"/>
+                <a:ea typeface="Arial"/>
+                <a:cs typeface="Arial"/>
+              </a:rPr>
+              <a:t xml:space="preserve">underneath was telling the truth. Go find</a:t>
+            </a:r>
+            <a:endParaRPr lang="en-US" sz="1500"/>
+          </a:p>
+          <a:p>
+            <a:pPr marL="0" indent="0">
+              <a:lnSpc>
+                <a:spcPts val="1950"/>
+              </a:lnSpc>
+              <a:spcAft>
+                <a:spcPts val="0"/>
+              </a:spcAft>
+              <a:buNone/>
+            </a:pPr>
+            <a:r>
+              <a:rPr lang="en-US" sz="1500" b="0">
+                <a:solidFill>
+                  <a:srgbClr val="202B33"/>
+                </a:solidFill>
+                <a:latin typeface="Arial"/>
+                <a:ea typeface="Arial"/>
+                <a:cs typeface="Arial"/>
+              </a:rPr>
+              <a:t xml:space="preserve">the documents your eval set never judged.</a:t>
             </a:r>
             <a:endParaRPr lang="en-US" sz="1500"/>
           </a:p>

--- a/artifacts/speaking-portfolio-expanded/decks/retrieval-15min-handout.pptx
+++ b/artifacts/speaking-portfolio-expanded/decks/retrieval-15min-handout.pptx
@@ -855,7 +855,7 @@
                 <a:ea typeface="Arial"/>
                 <a:cs typeface="Arial"/>
               </a:rPr>
-              <a:t xml:space="preserve">Source slide 2. 01:30 to 02:30</a:t>
+              <a:t xml:space="preserve">Source slide 2. 01:30 to 03:15</a:t>
             </a:r>
             <a:endParaRPr lang="en-US" sz="1200"/>
           </a:p>
@@ -1336,7 +1336,7 @@
                 <a:ea typeface="Arial"/>
                 <a:cs typeface="Arial"/>
               </a:rPr>
-              <a:t xml:space="preserve">Source slide 8. 02:30 to 05:00</a:t>
+              <a:t xml:space="preserve">Source slide 8. 03:15 to 05:15</a:t>
             </a:r>
             <a:endParaRPr lang="en-US" sz="1200"/>
           </a:p>
@@ -1955,7 +1955,7 @@
                 <a:ea typeface="Arial"/>
                 <a:cs typeface="Arial"/>
               </a:rPr>
-              <a:t xml:space="preserve">Source slide 9. 05:00 to 06:30</a:t>
+              <a:t xml:space="preserve">Source slide 9. 05:15 to 06:45</a:t>
             </a:r>
             <a:endParaRPr lang="en-US" sz="1200"/>
           </a:p>
@@ -2482,7 +2482,7 @@
                 <a:ea typeface="Arial"/>
                 <a:cs typeface="Arial"/>
               </a:rPr>
-              <a:t xml:space="preserve">Source slide 10. 06:30 to 09:30</a:t>
+              <a:t xml:space="preserve">Source slide 10. 06:45 to 09:45</a:t>
             </a:r>
             <a:endParaRPr lang="en-US" sz="1200"/>
           </a:p>
@@ -3101,7 +3101,7 @@
                 <a:ea typeface="Arial"/>
                 <a:cs typeface="Arial"/>
               </a:rPr>
-              <a:t xml:space="preserve">Source slide 11. 09:30 to 11:30</a:t>
+              <a:t xml:space="preserve">Source slide 11. 09:45 to 11:30</a:t>
             </a:r>
             <a:endParaRPr lang="en-US" sz="1200"/>
           </a:p>
